--- a/assets/powerpoints/module-n3-epicerie/C4-attention-c-est-dangereux.pptx
+++ b/assets/powerpoints/module-n3-epicerie/C4-attention-c-est-dangereux.pptx
@@ -11489,7 +11489,25 @@
                 </a:solidFill>
                 <a:latin typeface="Verdana"/>
               </a:rPr>
-              <a:t>L'eau de Javel et un nettoyant à l'ammoniac produisent ensemble un &lt;b&gt;gaz toxique&lt;/b&gt; qui envoie des gens à l'hôpital chaque année. Mélanger ne rend pas un produit « plus fort » : cela le rend dangereux. L'avertissement est écrit sur la bouteille — et presque personne ne le lit.</a:t>
+              <a:t>L'eau de Javel et un nettoyant à l'ammoniac produisent ensemble un </a:t>
+            </a:r>
+            <a:r>
+              <a:rPr sz="2000" b="1" i="0">
+                <a:solidFill>
+                  <a:srgbClr val="4B4F52"/>
+                </a:solidFill>
+                <a:latin typeface="Verdana"/>
+              </a:rPr>
+              <a:t>gaz toxique</a:t>
+            </a:r>
+            <a:r>
+              <a:rPr sz="2000" b="0" i="0">
+                <a:solidFill>
+                  <a:srgbClr val="4B4F52"/>
+                </a:solidFill>
+                <a:latin typeface="Verdana"/>
+              </a:rPr>
+              <a:t> qui envoie des gens à l'hôpital chaque année. Mélanger ne rend pas un produit « plus fort » : cela le rend dangereux. L'avertissement est écrit sur la bouteille — et presque personne ne le lit.</a:t>
             </a:r>
           </a:p>
         </p:txBody>
